--- a/Output/Spats_plots.pptx
+++ b/Output/Spats_plots.pptx
@@ -112,6 +112,11 @@
       </a:defRPr>
     </a:lvl9pPr>
   </p:defaultTextStyle>
+  <p:extLst>
+    <p:ext uri="{EFAFB233-063F-42B5-8137-9DF3F51BA10A}">
+      <p15:sldGuideLst xmlns:p15="http://schemas.microsoft.com/office/powerpoint/2012/main"/>
+    </p:ext>
+  </p:extLst>
 </p:presentation>
 </file>
 
@@ -3366,10 +3371,10 @@
       </p:grpSpPr>
       <p:pic>
         <p:nvPicPr>
-          <p:cNvPr id="5" name="Picture 4">
-            <a:extLst>
-              <a:ext uri="{FF2B5EF4-FFF2-40B4-BE49-F238E27FC236}">
-                <a16:creationId xmlns:a16="http://schemas.microsoft.com/office/drawing/2014/main" id="{7C302940-2A07-6E66-5766-04B400612A76}"/>
+          <p:cNvPr id="11" name="Picture 10">
+            <a:extLst>
+              <a:ext uri="{FF2B5EF4-FFF2-40B4-BE49-F238E27FC236}">
+                <a16:creationId xmlns:a16="http://schemas.microsoft.com/office/drawing/2014/main" id="{4CB5417C-8A7E-0E8D-1C2B-DC91A55DA1FC}"/>
               </a:ext>
             </a:extLst>
           </p:cNvPr>
@@ -3392,8 +3397,8 @@
         </p:blipFill>
         <p:spPr>
           <a:xfrm>
-            <a:off x="1476607" y="321734"/>
-            <a:ext cx="3387953" cy="2905170"/>
+            <a:off x="1476606" y="321734"/>
+            <a:ext cx="3387955" cy="2905170"/>
           </a:xfrm>
           <a:prstGeom prst="rect">
             <a:avLst/>
@@ -3402,7 +3407,7 @@
       </p:pic>
       <p:sp>
         <p:nvSpPr>
-          <p:cNvPr id="23" name="Rectangle 22">
+          <p:cNvPr id="32" name="Rectangle 31">
             <a:extLst>
               <a:ext uri="{FF2B5EF4-FFF2-40B4-BE49-F238E27FC236}">
                 <a16:creationId xmlns:a16="http://schemas.microsoft.com/office/drawing/2014/main" id="{417CDA24-35F8-4540-8C52-3096D6D94949}"/>
@@ -3504,7 +3509,7 @@
       </p:pic>
       <p:sp>
         <p:nvSpPr>
-          <p:cNvPr id="25" name="Rectangle 24">
+          <p:cNvPr id="34" name="Rectangle 33">
             <a:extLst>
               <a:ext uri="{FF2B5EF4-FFF2-40B4-BE49-F238E27FC236}">
                 <a16:creationId xmlns:a16="http://schemas.microsoft.com/office/drawing/2014/main" id="{8658BFE0-4E65-4174-9C75-687C94E88273}"/>
@@ -3570,7 +3575,7 @@
       </p:sp>
       <p:sp>
         <p:nvSpPr>
-          <p:cNvPr id="27" name="Rectangle 26">
+          <p:cNvPr id="36" name="Rectangle 35">
             <a:extLst>
               <a:ext uri="{FF2B5EF4-FFF2-40B4-BE49-F238E27FC236}">
                 <a16:creationId xmlns:a16="http://schemas.microsoft.com/office/drawing/2014/main" id="{FA75DFED-A0C1-4A83-BE1D-0271C1826EF6}"/>
@@ -3636,10 +3641,10 @@
       </p:sp>
       <p:pic>
         <p:nvPicPr>
-          <p:cNvPr id="11" name="Picture 10">
-            <a:extLst>
-              <a:ext uri="{FF2B5EF4-FFF2-40B4-BE49-F238E27FC236}">
-                <a16:creationId xmlns:a16="http://schemas.microsoft.com/office/drawing/2014/main" id="{4CB5417C-8A7E-0E8D-1C2B-DC91A55DA1FC}"/>
+          <p:cNvPr id="4" name="Picture 3">
+            <a:extLst>
+              <a:ext uri="{FF2B5EF4-FFF2-40B4-BE49-F238E27FC236}">
+                <a16:creationId xmlns:a16="http://schemas.microsoft.com/office/drawing/2014/main" id="{BD28A061-349D-0BBB-A3FF-70ADD9FCEB90}"/>
               </a:ext>
             </a:extLst>
           </p:cNvPr>
@@ -3672,10 +3677,10 @@
       </p:pic>
       <p:pic>
         <p:nvPicPr>
-          <p:cNvPr id="9" name="Picture 8">
-            <a:extLst>
-              <a:ext uri="{FF2B5EF4-FFF2-40B4-BE49-F238E27FC236}">
-                <a16:creationId xmlns:a16="http://schemas.microsoft.com/office/drawing/2014/main" id="{56BDA952-89F1-68ED-1329-D49CF322FDE2}"/>
+          <p:cNvPr id="5" name="Picture 4">
+            <a:extLst>
+              <a:ext uri="{FF2B5EF4-FFF2-40B4-BE49-F238E27FC236}">
+                <a16:creationId xmlns:a16="http://schemas.microsoft.com/office/drawing/2014/main" id="{7C302940-2A07-6E66-5766-04B400612A76}"/>
               </a:ext>
             </a:extLst>
           </p:cNvPr>

--- a/Output/Spats_plots.pptx
+++ b/Output/Spats_plots.pptx
@@ -269,7 +269,7 @@
           <a:p>
             <a:fld id="{9414BEE6-A765-40B7-8EAA-6B0D1A964E29}" type="datetimeFigureOut">
               <a:rPr lang="LID4096" smtClean="0"/>
-              <a:t>01/24/2026</a:t>
+              <a:t>01/26/2026</a:t>
             </a:fld>
             <a:endParaRPr lang="LID4096"/>
           </a:p>
@@ -469,7 +469,7 @@
           <a:p>
             <a:fld id="{9414BEE6-A765-40B7-8EAA-6B0D1A964E29}" type="datetimeFigureOut">
               <a:rPr lang="LID4096" smtClean="0"/>
-              <a:t>01/24/2026</a:t>
+              <a:t>01/26/2026</a:t>
             </a:fld>
             <a:endParaRPr lang="LID4096"/>
           </a:p>
@@ -679,7 +679,7 @@
           <a:p>
             <a:fld id="{9414BEE6-A765-40B7-8EAA-6B0D1A964E29}" type="datetimeFigureOut">
               <a:rPr lang="LID4096" smtClean="0"/>
-              <a:t>01/24/2026</a:t>
+              <a:t>01/26/2026</a:t>
             </a:fld>
             <a:endParaRPr lang="LID4096"/>
           </a:p>
@@ -879,7 +879,7 @@
           <a:p>
             <a:fld id="{9414BEE6-A765-40B7-8EAA-6B0D1A964E29}" type="datetimeFigureOut">
               <a:rPr lang="LID4096" smtClean="0"/>
-              <a:t>01/24/2026</a:t>
+              <a:t>01/26/2026</a:t>
             </a:fld>
             <a:endParaRPr lang="LID4096"/>
           </a:p>
@@ -1155,7 +1155,7 @@
           <a:p>
             <a:fld id="{9414BEE6-A765-40B7-8EAA-6B0D1A964E29}" type="datetimeFigureOut">
               <a:rPr lang="LID4096" smtClean="0"/>
-              <a:t>01/24/2026</a:t>
+              <a:t>01/26/2026</a:t>
             </a:fld>
             <a:endParaRPr lang="LID4096"/>
           </a:p>
@@ -1423,7 +1423,7 @@
           <a:p>
             <a:fld id="{9414BEE6-A765-40B7-8EAA-6B0D1A964E29}" type="datetimeFigureOut">
               <a:rPr lang="LID4096" smtClean="0"/>
-              <a:t>01/24/2026</a:t>
+              <a:t>01/26/2026</a:t>
             </a:fld>
             <a:endParaRPr lang="LID4096"/>
           </a:p>
@@ -1838,7 +1838,7 @@
           <a:p>
             <a:fld id="{9414BEE6-A765-40B7-8EAA-6B0D1A964E29}" type="datetimeFigureOut">
               <a:rPr lang="LID4096" smtClean="0"/>
-              <a:t>01/24/2026</a:t>
+              <a:t>01/26/2026</a:t>
             </a:fld>
             <a:endParaRPr lang="LID4096"/>
           </a:p>
@@ -1980,7 +1980,7 @@
           <a:p>
             <a:fld id="{9414BEE6-A765-40B7-8EAA-6B0D1A964E29}" type="datetimeFigureOut">
               <a:rPr lang="LID4096" smtClean="0"/>
-              <a:t>01/24/2026</a:t>
+              <a:t>01/26/2026</a:t>
             </a:fld>
             <a:endParaRPr lang="LID4096"/>
           </a:p>
@@ -2093,7 +2093,7 @@
           <a:p>
             <a:fld id="{9414BEE6-A765-40B7-8EAA-6B0D1A964E29}" type="datetimeFigureOut">
               <a:rPr lang="LID4096" smtClean="0"/>
-              <a:t>01/24/2026</a:t>
+              <a:t>01/26/2026</a:t>
             </a:fld>
             <a:endParaRPr lang="LID4096"/>
           </a:p>
@@ -2406,7 +2406,7 @@
           <a:p>
             <a:fld id="{9414BEE6-A765-40B7-8EAA-6B0D1A964E29}" type="datetimeFigureOut">
               <a:rPr lang="LID4096" smtClean="0"/>
-              <a:t>01/24/2026</a:t>
+              <a:t>01/26/2026</a:t>
             </a:fld>
             <a:endParaRPr lang="LID4096"/>
           </a:p>
@@ -2695,7 +2695,7 @@
           <a:p>
             <a:fld id="{9414BEE6-A765-40B7-8EAA-6B0D1A964E29}" type="datetimeFigureOut">
               <a:rPr lang="LID4096" smtClean="0"/>
-              <a:t>01/24/2026</a:t>
+              <a:t>01/26/2026</a:t>
             </a:fld>
             <a:endParaRPr lang="LID4096"/>
           </a:p>
@@ -2938,7 +2938,7 @@
           <a:p>
             <a:fld id="{9414BEE6-A765-40B7-8EAA-6B0D1A964E29}" type="datetimeFigureOut">
               <a:rPr lang="LID4096" smtClean="0"/>
-              <a:t>01/24/2026</a:t>
+              <a:t>01/26/2026</a:t>
             </a:fld>
             <a:endParaRPr lang="LID4096"/>
           </a:p>
@@ -3371,10 +3371,10 @@
       </p:grpSpPr>
       <p:pic>
         <p:nvPicPr>
-          <p:cNvPr id="11" name="Picture 10">
-            <a:extLst>
-              <a:ext uri="{FF2B5EF4-FFF2-40B4-BE49-F238E27FC236}">
-                <a16:creationId xmlns:a16="http://schemas.microsoft.com/office/drawing/2014/main" id="{4CB5417C-8A7E-0E8D-1C2B-DC91A55DA1FC}"/>
+          <p:cNvPr id="10" name="Picture 9">
+            <a:extLst>
+              <a:ext uri="{FF2B5EF4-FFF2-40B4-BE49-F238E27FC236}">
+                <a16:creationId xmlns:a16="http://schemas.microsoft.com/office/drawing/2014/main" id="{88C9544D-5996-12DF-98E9-8FC394BAD26E}"/>
               </a:ext>
             </a:extLst>
           </p:cNvPr>
@@ -3397,8 +3397,8 @@
         </p:blipFill>
         <p:spPr>
           <a:xfrm>
-            <a:off x="1476606" y="321734"/>
-            <a:ext cx="3387955" cy="2905170"/>
+            <a:off x="1476607" y="321734"/>
+            <a:ext cx="3387953" cy="2905170"/>
           </a:xfrm>
           <a:prstGeom prst="rect">
             <a:avLst/>
@@ -3407,7 +3407,7 @@
       </p:pic>
       <p:sp>
         <p:nvSpPr>
-          <p:cNvPr id="32" name="Rectangle 31">
+          <p:cNvPr id="41" name="Rectangle 40">
             <a:extLst>
               <a:ext uri="{FF2B5EF4-FFF2-40B4-BE49-F238E27FC236}">
                 <a16:creationId xmlns:a16="http://schemas.microsoft.com/office/drawing/2014/main" id="{417CDA24-35F8-4540-8C52-3096D6D94949}"/>
@@ -3473,10 +3473,10 @@
       </p:sp>
       <p:pic>
         <p:nvPicPr>
-          <p:cNvPr id="3" name="Picture 2">
-            <a:extLst>
-              <a:ext uri="{FF2B5EF4-FFF2-40B4-BE49-F238E27FC236}">
-                <a16:creationId xmlns:a16="http://schemas.microsoft.com/office/drawing/2014/main" id="{2A4D1A18-E95E-ECFD-19C2-A2BCB52D9104}"/>
+          <p:cNvPr id="6" name="Picture 5">
+            <a:extLst>
+              <a:ext uri="{FF2B5EF4-FFF2-40B4-BE49-F238E27FC236}">
+                <a16:creationId xmlns:a16="http://schemas.microsoft.com/office/drawing/2014/main" id="{3CCA702A-B03F-8C31-1AF9-0510B524DCD7}"/>
               </a:ext>
             </a:extLst>
           </p:cNvPr>
@@ -3509,7 +3509,7 @@
       </p:pic>
       <p:sp>
         <p:nvSpPr>
-          <p:cNvPr id="34" name="Rectangle 33">
+          <p:cNvPr id="43" name="Rectangle 42">
             <a:extLst>
               <a:ext uri="{FF2B5EF4-FFF2-40B4-BE49-F238E27FC236}">
                 <a16:creationId xmlns:a16="http://schemas.microsoft.com/office/drawing/2014/main" id="{8658BFE0-4E65-4174-9C75-687C94E88273}"/>
@@ -3575,7 +3575,7 @@
       </p:sp>
       <p:sp>
         <p:nvSpPr>
-          <p:cNvPr id="36" name="Rectangle 35">
+          <p:cNvPr id="45" name="Rectangle 44">
             <a:extLst>
               <a:ext uri="{FF2B5EF4-FFF2-40B4-BE49-F238E27FC236}">
                 <a16:creationId xmlns:a16="http://schemas.microsoft.com/office/drawing/2014/main" id="{FA75DFED-A0C1-4A83-BE1D-0271C1826EF6}"/>
@@ -3641,10 +3641,10 @@
       </p:sp>
       <p:pic>
         <p:nvPicPr>
-          <p:cNvPr id="4" name="Picture 3">
-            <a:extLst>
-              <a:ext uri="{FF2B5EF4-FFF2-40B4-BE49-F238E27FC236}">
-                <a16:creationId xmlns:a16="http://schemas.microsoft.com/office/drawing/2014/main" id="{BD28A061-349D-0BBB-A3FF-70ADD9FCEB90}"/>
+          <p:cNvPr id="8" name="Picture 7">
+            <a:extLst>
+              <a:ext uri="{FF2B5EF4-FFF2-40B4-BE49-F238E27FC236}">
+                <a16:creationId xmlns:a16="http://schemas.microsoft.com/office/drawing/2014/main" id="{8B5258E3-4D04-720B-CD49-F5D2EA8D460A}"/>
               </a:ext>
             </a:extLst>
           </p:cNvPr>
@@ -3677,10 +3677,10 @@
       </p:pic>
       <p:pic>
         <p:nvPicPr>
-          <p:cNvPr id="5" name="Picture 4">
-            <a:extLst>
-              <a:ext uri="{FF2B5EF4-FFF2-40B4-BE49-F238E27FC236}">
-                <a16:creationId xmlns:a16="http://schemas.microsoft.com/office/drawing/2014/main" id="{7C302940-2A07-6E66-5766-04B400612A76}"/>
+          <p:cNvPr id="13" name="Picture 12">
+            <a:extLst>
+              <a:ext uri="{FF2B5EF4-FFF2-40B4-BE49-F238E27FC236}">
+                <a16:creationId xmlns:a16="http://schemas.microsoft.com/office/drawing/2014/main" id="{A3ECC8D8-A7A1-7EBE-9608-31F2D6AEABBB}"/>
               </a:ext>
             </a:extLst>
           </p:cNvPr>

--- a/Output/Spats_plots.pptx
+++ b/Output/Spats_plots.pptx
@@ -6,14 +6,15 @@
   </p:sldMasterIdLst>
   <p:sldIdLst>
     <p:sldId id="258" r:id="rId2"/>
-    <p:sldId id="256" r:id="rId3"/>
-    <p:sldId id="257" r:id="rId4"/>
-    <p:sldId id="259" r:id="rId5"/>
-    <p:sldId id="260" r:id="rId6"/>
-    <p:sldId id="261" r:id="rId7"/>
-    <p:sldId id="262" r:id="rId8"/>
-    <p:sldId id="263" r:id="rId9"/>
-    <p:sldId id="264" r:id="rId10"/>
+    <p:sldId id="265" r:id="rId3"/>
+    <p:sldId id="256" r:id="rId4"/>
+    <p:sldId id="257" r:id="rId5"/>
+    <p:sldId id="259" r:id="rId6"/>
+    <p:sldId id="260" r:id="rId7"/>
+    <p:sldId id="261" r:id="rId8"/>
+    <p:sldId id="262" r:id="rId9"/>
+    <p:sldId id="263" r:id="rId10"/>
+    <p:sldId id="264" r:id="rId11"/>
   </p:sldIdLst>
   <p:sldSz cx="12192000" cy="6858000"/>
   <p:notesSz cx="6858000" cy="9144000"/>
@@ -3724,7 +3725,429 @@
 </p:sld>
 </file>
 
+<file path=ppt/slides/slide10.xml><?xml version="1.0" encoding="utf-8"?>
+<p:sld xmlns:a="http://schemas.openxmlformats.org/drawingml/2006/main" xmlns:r="http://schemas.openxmlformats.org/officeDocument/2006/relationships" xmlns:p="http://schemas.openxmlformats.org/presentationml/2006/main">
+  <p:cSld>
+    <p:spTree>
+      <p:nvGrpSpPr>
+        <p:cNvPr id="1" name="">
+          <a:extLst>
+            <a:ext uri="{FF2B5EF4-FFF2-40B4-BE49-F238E27FC236}">
+              <a16:creationId xmlns:a16="http://schemas.microsoft.com/office/drawing/2014/main" id="{974291D9-8A20-1378-EC50-D3F8CAE5B600}"/>
+            </a:ext>
+          </a:extLst>
+        </p:cNvPr>
+        <p:cNvGrpSpPr/>
+        <p:nvPr/>
+      </p:nvGrpSpPr>
+      <p:grpSpPr>
+        <a:xfrm>
+          <a:off x="0" y="0"/>
+          <a:ext cx="0" cy="0"/>
+          <a:chOff x="0" y="0"/>
+          <a:chExt cx="0" cy="0"/>
+        </a:xfrm>
+      </p:grpSpPr>
+    </p:spTree>
+    <p:extLst>
+      <p:ext uri="{BB962C8B-B14F-4D97-AF65-F5344CB8AC3E}">
+        <p14:creationId xmlns:p14="http://schemas.microsoft.com/office/powerpoint/2010/main" val="864629097"/>
+      </p:ext>
+    </p:extLst>
+  </p:cSld>
+  <p:clrMapOvr>
+    <a:masterClrMapping/>
+  </p:clrMapOvr>
+</p:sld>
+</file>
+
 <file path=ppt/slides/slide2.xml><?xml version="1.0" encoding="utf-8"?>
+<p:sld xmlns:a="http://schemas.openxmlformats.org/drawingml/2006/main" xmlns:r="http://schemas.openxmlformats.org/officeDocument/2006/relationships" xmlns:p="http://schemas.openxmlformats.org/presentationml/2006/main">
+  <p:cSld>
+    <p:bg>
+      <p:bgPr>
+        <a:solidFill>
+          <a:schemeClr val="bg1"/>
+        </a:solidFill>
+        <a:effectLst/>
+      </p:bgPr>
+    </p:bg>
+    <p:spTree>
+      <p:nvGrpSpPr>
+        <p:cNvPr id="1" name="">
+          <a:extLst>
+            <a:ext uri="{FF2B5EF4-FFF2-40B4-BE49-F238E27FC236}">
+              <a16:creationId xmlns:a16="http://schemas.microsoft.com/office/drawing/2014/main" id="{0540CF4E-D4DA-A745-A0BE-2F18233BFB5E}"/>
+            </a:ext>
+          </a:extLst>
+        </p:cNvPr>
+        <p:cNvGrpSpPr/>
+        <p:nvPr/>
+      </p:nvGrpSpPr>
+      <p:grpSpPr>
+        <a:xfrm>
+          <a:off x="0" y="0"/>
+          <a:ext cx="0" cy="0"/>
+          <a:chOff x="0" y="0"/>
+          <a:chExt cx="0" cy="0"/>
+        </a:xfrm>
+      </p:grpSpPr>
+      <p:sp>
+        <p:nvSpPr>
+          <p:cNvPr id="41" name="Rectangle 40">
+            <a:extLst>
+              <a:ext uri="{FF2B5EF4-FFF2-40B4-BE49-F238E27FC236}">
+                <a16:creationId xmlns:a16="http://schemas.microsoft.com/office/drawing/2014/main" id="{31061D95-6523-47EC-D8C4-0FCDE70AAF04}"/>
+              </a:ext>
+              <a:ext uri="{C183D7F6-B498-43B3-948B-1728B52AA6E4}">
+                <adec:decorative xmlns:adec="http://schemas.microsoft.com/office/drawing/2017/decorative" val="1"/>
+              </a:ext>
+            </a:extLst>
+          </p:cNvPr>
+          <p:cNvSpPr>
+            <a:spLocks noGrp="1" noRot="1" noChangeAspect="1" noMove="1" noResize="1" noEditPoints="1" noAdjustHandles="1" noChangeArrowheads="1" noChangeShapeType="1" noTextEdit="1"/>
+          </p:cNvSpPr>
+          <p:nvPr>
+            <p:extLst>
+              <p:ext uri="{386F3935-93C4-4BCD-93E2-E3B085C9AB24}">
+                <p16:designElem xmlns:p16="http://schemas.microsoft.com/office/powerpoint/2015/main" val="1"/>
+              </p:ext>
+            </p:extLst>
+          </p:nvPr>
+        </p:nvSpPr>
+        <p:spPr>
+          <a:xfrm>
+            <a:off x="6050280" y="0"/>
+            <a:ext cx="91440" cy="6858000"/>
+          </a:xfrm>
+          <a:prstGeom prst="rect">
+            <a:avLst/>
+          </a:prstGeom>
+          <a:solidFill>
+            <a:schemeClr val="tx1">
+              <a:lumMod val="75000"/>
+              <a:lumOff val="25000"/>
+            </a:schemeClr>
+          </a:solidFill>
+          <a:ln>
+            <a:noFill/>
+          </a:ln>
+        </p:spPr>
+        <p:style>
+          <a:lnRef idx="2">
+            <a:schemeClr val="accent1">
+              <a:shade val="50000"/>
+            </a:schemeClr>
+          </a:lnRef>
+          <a:fillRef idx="1">
+            <a:schemeClr val="accent1"/>
+          </a:fillRef>
+          <a:effectRef idx="0">
+            <a:schemeClr val="accent1"/>
+          </a:effectRef>
+          <a:fontRef idx="minor">
+            <a:schemeClr val="lt1"/>
+          </a:fontRef>
+        </p:style>
+        <p:txBody>
+          <a:bodyPr rtlCol="0" anchor="ctr"/>
+          <a:lstStyle/>
+          <a:p>
+            <a:pPr algn="ctr"/>
+            <a:endParaRPr lang="en-US"/>
+          </a:p>
+        </p:txBody>
+      </p:sp>
+      <p:sp>
+        <p:nvSpPr>
+          <p:cNvPr id="43" name="Rectangle 42">
+            <a:extLst>
+              <a:ext uri="{FF2B5EF4-FFF2-40B4-BE49-F238E27FC236}">
+                <a16:creationId xmlns:a16="http://schemas.microsoft.com/office/drawing/2014/main" id="{102B5DF4-C242-A61D-1DD3-1B8F321C4ACC}"/>
+              </a:ext>
+              <a:ext uri="{C183D7F6-B498-43B3-948B-1728B52AA6E4}">
+                <adec:decorative xmlns:adec="http://schemas.microsoft.com/office/drawing/2017/decorative" val="1"/>
+              </a:ext>
+            </a:extLst>
+          </p:cNvPr>
+          <p:cNvSpPr>
+            <a:spLocks noGrp="1" noRot="1" noChangeAspect="1" noMove="1" noResize="1" noEditPoints="1" noAdjustHandles="1" noChangeArrowheads="1" noChangeShapeType="1" noTextEdit="1"/>
+          </p:cNvSpPr>
+          <p:nvPr>
+            <p:extLst>
+              <p:ext uri="{386F3935-93C4-4BCD-93E2-E3B085C9AB24}">
+                <p16:designElem xmlns:p16="http://schemas.microsoft.com/office/powerpoint/2015/main" val="1"/>
+              </p:ext>
+            </p:extLst>
+          </p:nvPr>
+        </p:nvSpPr>
+        <p:spPr>
+          <a:xfrm>
+            <a:off x="0" y="3383280"/>
+            <a:ext cx="6126480" cy="91440"/>
+          </a:xfrm>
+          <a:prstGeom prst="rect">
+            <a:avLst/>
+          </a:prstGeom>
+          <a:solidFill>
+            <a:schemeClr val="tx1">
+              <a:lumMod val="75000"/>
+              <a:lumOff val="25000"/>
+            </a:schemeClr>
+          </a:solidFill>
+          <a:ln>
+            <a:noFill/>
+          </a:ln>
+        </p:spPr>
+        <p:style>
+          <a:lnRef idx="2">
+            <a:schemeClr val="accent1">
+              <a:shade val="50000"/>
+            </a:schemeClr>
+          </a:lnRef>
+          <a:fillRef idx="1">
+            <a:schemeClr val="accent1"/>
+          </a:fillRef>
+          <a:effectRef idx="0">
+            <a:schemeClr val="accent1"/>
+          </a:effectRef>
+          <a:fontRef idx="minor">
+            <a:schemeClr val="lt1"/>
+          </a:fontRef>
+        </p:style>
+        <p:txBody>
+          <a:bodyPr rtlCol="0" anchor="ctr"/>
+          <a:lstStyle/>
+          <a:p>
+            <a:pPr algn="ctr"/>
+            <a:endParaRPr lang="en-US"/>
+          </a:p>
+        </p:txBody>
+      </p:sp>
+      <p:sp>
+        <p:nvSpPr>
+          <p:cNvPr id="45" name="Rectangle 44">
+            <a:extLst>
+              <a:ext uri="{FF2B5EF4-FFF2-40B4-BE49-F238E27FC236}">
+                <a16:creationId xmlns:a16="http://schemas.microsoft.com/office/drawing/2014/main" id="{5F228117-D2BA-54B4-86AF-A387FC9BF9D8}"/>
+              </a:ext>
+              <a:ext uri="{C183D7F6-B498-43B3-948B-1728B52AA6E4}">
+                <adec:decorative xmlns:adec="http://schemas.microsoft.com/office/drawing/2017/decorative" val="1"/>
+              </a:ext>
+            </a:extLst>
+          </p:cNvPr>
+          <p:cNvSpPr>
+            <a:spLocks noGrp="1" noRot="1" noChangeAspect="1" noMove="1" noResize="1" noEditPoints="1" noAdjustHandles="1" noChangeArrowheads="1" noChangeShapeType="1" noTextEdit="1"/>
+          </p:cNvSpPr>
+          <p:nvPr>
+            <p:extLst>
+              <p:ext uri="{386F3935-93C4-4BCD-93E2-E3B085C9AB24}">
+                <p16:designElem xmlns:p16="http://schemas.microsoft.com/office/powerpoint/2015/main" val="1"/>
+              </p:ext>
+            </p:extLst>
+          </p:nvPr>
+        </p:nvSpPr>
+        <p:spPr>
+          <a:xfrm>
+            <a:off x="6065520" y="3383280"/>
+            <a:ext cx="6126480" cy="91440"/>
+          </a:xfrm>
+          <a:prstGeom prst="rect">
+            <a:avLst/>
+          </a:prstGeom>
+          <a:solidFill>
+            <a:schemeClr val="tx1">
+              <a:lumMod val="75000"/>
+              <a:lumOff val="25000"/>
+            </a:schemeClr>
+          </a:solidFill>
+          <a:ln>
+            <a:noFill/>
+          </a:ln>
+        </p:spPr>
+        <p:style>
+          <a:lnRef idx="2">
+            <a:schemeClr val="accent1">
+              <a:shade val="50000"/>
+            </a:schemeClr>
+          </a:lnRef>
+          <a:fillRef idx="1">
+            <a:schemeClr val="accent1"/>
+          </a:fillRef>
+          <a:effectRef idx="0">
+            <a:schemeClr val="accent1"/>
+          </a:effectRef>
+          <a:fontRef idx="minor">
+            <a:schemeClr val="lt1"/>
+          </a:fontRef>
+        </p:style>
+        <p:txBody>
+          <a:bodyPr rtlCol="0" anchor="ctr"/>
+          <a:lstStyle/>
+          <a:p>
+            <a:pPr algn="ctr"/>
+            <a:endParaRPr lang="en-US"/>
+          </a:p>
+        </p:txBody>
+      </p:sp>
+      <p:pic>
+        <p:nvPicPr>
+          <p:cNvPr id="11" name="Picture 10">
+            <a:extLst>
+              <a:ext uri="{FF2B5EF4-FFF2-40B4-BE49-F238E27FC236}">
+                <a16:creationId xmlns:a16="http://schemas.microsoft.com/office/drawing/2014/main" id="{09650F47-98ED-A917-0DB9-D9997A76ED69}"/>
+              </a:ext>
+            </a:extLst>
+          </p:cNvPr>
+          <p:cNvPicPr>
+            <a:picLocks noChangeAspect="1"/>
+          </p:cNvPicPr>
+          <p:nvPr/>
+        </p:nvPicPr>
+        <p:blipFill>
+          <a:blip r:embed="rId2">
+            <a:extLst>
+              <a:ext uri="{28A0092B-C50C-407E-A947-70E740481C1C}">
+                <a14:useLocalDpi xmlns:a14="http://schemas.microsoft.com/office/drawing/2010/main" val="0"/>
+              </a:ext>
+            </a:extLst>
+          </a:blip>
+          <a:stretch>
+            <a:fillRect/>
+          </a:stretch>
+        </p:blipFill>
+        <p:spPr>
+          <a:xfrm>
+            <a:off x="1106122" y="242468"/>
+            <a:ext cx="3381401" cy="2898344"/>
+          </a:xfrm>
+          <a:prstGeom prst="rect">
+            <a:avLst/>
+          </a:prstGeom>
+        </p:spPr>
+      </p:pic>
+      <p:pic>
+        <p:nvPicPr>
+          <p:cNvPr id="14" name="Picture 13">
+            <a:extLst>
+              <a:ext uri="{FF2B5EF4-FFF2-40B4-BE49-F238E27FC236}">
+                <a16:creationId xmlns:a16="http://schemas.microsoft.com/office/drawing/2014/main" id="{4669CC5C-3E74-C802-A4E3-CCB9DCE76B38}"/>
+              </a:ext>
+            </a:extLst>
+          </p:cNvPr>
+          <p:cNvPicPr>
+            <a:picLocks noChangeAspect="1"/>
+          </p:cNvPicPr>
+          <p:nvPr/>
+        </p:nvPicPr>
+        <p:blipFill>
+          <a:blip r:embed="rId3">
+            <a:extLst>
+              <a:ext uri="{28A0092B-C50C-407E-A947-70E740481C1C}">
+                <a14:useLocalDpi xmlns:a14="http://schemas.microsoft.com/office/drawing/2010/main" val="0"/>
+              </a:ext>
+            </a:extLst>
+          </a:blip>
+          <a:stretch>
+            <a:fillRect/>
+          </a:stretch>
+        </p:blipFill>
+        <p:spPr>
+          <a:xfrm>
+            <a:off x="1028509" y="3584139"/>
+            <a:ext cx="3536625" cy="3031393"/>
+          </a:xfrm>
+          <a:prstGeom prst="rect">
+            <a:avLst/>
+          </a:prstGeom>
+        </p:spPr>
+      </p:pic>
+      <p:pic>
+        <p:nvPicPr>
+          <p:cNvPr id="16" name="Picture 15">
+            <a:extLst>
+              <a:ext uri="{FF2B5EF4-FFF2-40B4-BE49-F238E27FC236}">
+                <a16:creationId xmlns:a16="http://schemas.microsoft.com/office/drawing/2014/main" id="{B3B822F8-11ED-E23E-0FF6-ED4E4D5C1E80}"/>
+              </a:ext>
+            </a:extLst>
+          </p:cNvPr>
+          <p:cNvPicPr>
+            <a:picLocks noChangeAspect="1"/>
+          </p:cNvPicPr>
+          <p:nvPr/>
+        </p:nvPicPr>
+        <p:blipFill>
+          <a:blip r:embed="rId4">
+            <a:extLst>
+              <a:ext uri="{28A0092B-C50C-407E-A947-70E740481C1C}">
+                <a14:useLocalDpi xmlns:a14="http://schemas.microsoft.com/office/drawing/2010/main" val="0"/>
+              </a:ext>
+            </a:extLst>
+          </a:blip>
+          <a:stretch>
+            <a:fillRect/>
+          </a:stretch>
+        </p:blipFill>
+        <p:spPr>
+          <a:xfrm>
+            <a:off x="7704477" y="3696383"/>
+            <a:ext cx="3274721" cy="2806904"/>
+          </a:xfrm>
+          <a:prstGeom prst="rect">
+            <a:avLst/>
+          </a:prstGeom>
+        </p:spPr>
+      </p:pic>
+      <p:pic>
+        <p:nvPicPr>
+          <p:cNvPr id="18" name="Picture 17">
+            <a:extLst>
+              <a:ext uri="{FF2B5EF4-FFF2-40B4-BE49-F238E27FC236}">
+                <a16:creationId xmlns:a16="http://schemas.microsoft.com/office/drawing/2014/main" id="{E339B0F7-7FDC-AEF5-BC38-5D2F4C264750}"/>
+              </a:ext>
+            </a:extLst>
+          </p:cNvPr>
+          <p:cNvPicPr>
+            <a:picLocks noChangeAspect="1"/>
+          </p:cNvPicPr>
+          <p:nvPr/>
+        </p:nvPicPr>
+        <p:blipFill>
+          <a:blip r:embed="rId5">
+            <a:extLst>
+              <a:ext uri="{28A0092B-C50C-407E-A947-70E740481C1C}">
+                <a14:useLocalDpi xmlns:a14="http://schemas.microsoft.com/office/drawing/2010/main" val="0"/>
+              </a:ext>
+            </a:extLst>
+          </a:blip>
+          <a:stretch>
+            <a:fillRect/>
+          </a:stretch>
+        </p:blipFill>
+        <p:spPr>
+          <a:xfrm>
+            <a:off x="7374189" y="194947"/>
+            <a:ext cx="3077502" cy="3077502"/>
+          </a:xfrm>
+          <a:prstGeom prst="rect">
+            <a:avLst/>
+          </a:prstGeom>
+        </p:spPr>
+      </p:pic>
+    </p:spTree>
+    <p:extLst>
+      <p:ext uri="{BB962C8B-B14F-4D97-AF65-F5344CB8AC3E}">
+        <p14:creationId xmlns:p14="http://schemas.microsoft.com/office/powerpoint/2010/main" val="622253120"/>
+      </p:ext>
+    </p:extLst>
+  </p:cSld>
+  <p:clrMapOvr>
+    <a:masterClrMapping/>
+  </p:clrMapOvr>
+</p:sld>
+</file>
+
+<file path=ppt/slides/slide3.xml><?xml version="1.0" encoding="utf-8"?>
 <p:sld xmlns:a="http://schemas.openxmlformats.org/drawingml/2006/main" xmlns:r="http://schemas.openxmlformats.org/officeDocument/2006/relationships" xmlns:p="http://schemas.openxmlformats.org/presentationml/2006/main">
   <p:cSld>
     <p:spTree>
@@ -3754,7 +4177,7 @@
 </p:sld>
 </file>
 
-<file path=ppt/slides/slide3.xml><?xml version="1.0" encoding="utf-8"?>
+<file path=ppt/slides/slide4.xml><?xml version="1.0" encoding="utf-8"?>
 <p:sld xmlns:a="http://schemas.openxmlformats.org/drawingml/2006/main" xmlns:r="http://schemas.openxmlformats.org/officeDocument/2006/relationships" xmlns:p="http://schemas.openxmlformats.org/presentationml/2006/main">
   <p:cSld>
     <p:spTree>
@@ -3784,7 +4207,7 @@
 </p:sld>
 </file>
 
-<file path=ppt/slides/slide4.xml><?xml version="1.0" encoding="utf-8"?>
+<file path=ppt/slides/slide5.xml><?xml version="1.0" encoding="utf-8"?>
 <p:sld xmlns:a="http://schemas.openxmlformats.org/drawingml/2006/main" xmlns:r="http://schemas.openxmlformats.org/officeDocument/2006/relationships" xmlns:p="http://schemas.openxmlformats.org/presentationml/2006/main">
   <p:cSld>
     <p:spTree>
@@ -3814,7 +4237,7 @@
 </p:sld>
 </file>
 
-<file path=ppt/slides/slide5.xml><?xml version="1.0" encoding="utf-8"?>
+<file path=ppt/slides/slide6.xml><?xml version="1.0" encoding="utf-8"?>
 <p:sld xmlns:a="http://schemas.openxmlformats.org/drawingml/2006/main" xmlns:r="http://schemas.openxmlformats.org/officeDocument/2006/relationships" xmlns:p="http://schemas.openxmlformats.org/presentationml/2006/main">
   <p:cSld>
     <p:spTree>
@@ -3850,7 +4273,7 @@
 </p:sld>
 </file>
 
-<file path=ppt/slides/slide6.xml><?xml version="1.0" encoding="utf-8"?>
+<file path=ppt/slides/slide7.xml><?xml version="1.0" encoding="utf-8"?>
 <p:sld xmlns:a="http://schemas.openxmlformats.org/drawingml/2006/main" xmlns:r="http://schemas.openxmlformats.org/officeDocument/2006/relationships" xmlns:p="http://schemas.openxmlformats.org/presentationml/2006/main">
   <p:cSld>
     <p:spTree>
@@ -3880,7 +4303,7 @@
 </p:sld>
 </file>
 
-<file path=ppt/slides/slide7.xml><?xml version="1.0" encoding="utf-8"?>
+<file path=ppt/slides/slide8.xml><?xml version="1.0" encoding="utf-8"?>
 <p:sld xmlns:a="http://schemas.openxmlformats.org/drawingml/2006/main" xmlns:r="http://schemas.openxmlformats.org/officeDocument/2006/relationships" xmlns:p="http://schemas.openxmlformats.org/presentationml/2006/main">
   <p:cSld>
     <p:spTree>
@@ -3916,7 +4339,7 @@
 </p:sld>
 </file>
 
-<file path=ppt/slides/slide8.xml><?xml version="1.0" encoding="utf-8"?>
+<file path=ppt/slides/slide9.xml><?xml version="1.0" encoding="utf-8"?>
 <p:sld xmlns:a="http://schemas.openxmlformats.org/drawingml/2006/main" xmlns:r="http://schemas.openxmlformats.org/officeDocument/2006/relationships" xmlns:p="http://schemas.openxmlformats.org/presentationml/2006/main">
   <p:cSld>
     <p:spTree>
@@ -3937,42 +4360,6 @@
     <p:extLst>
       <p:ext uri="{BB962C8B-B14F-4D97-AF65-F5344CB8AC3E}">
         <p14:creationId xmlns:p14="http://schemas.microsoft.com/office/powerpoint/2010/main" val="508894011"/>
-      </p:ext>
-    </p:extLst>
-  </p:cSld>
-  <p:clrMapOvr>
-    <a:masterClrMapping/>
-  </p:clrMapOvr>
-</p:sld>
-</file>
-
-<file path=ppt/slides/slide9.xml><?xml version="1.0" encoding="utf-8"?>
-<p:sld xmlns:a="http://schemas.openxmlformats.org/drawingml/2006/main" xmlns:r="http://schemas.openxmlformats.org/officeDocument/2006/relationships" xmlns:p="http://schemas.openxmlformats.org/presentationml/2006/main">
-  <p:cSld>
-    <p:spTree>
-      <p:nvGrpSpPr>
-        <p:cNvPr id="1" name="">
-          <a:extLst>
-            <a:ext uri="{FF2B5EF4-FFF2-40B4-BE49-F238E27FC236}">
-              <a16:creationId xmlns:a16="http://schemas.microsoft.com/office/drawing/2014/main" id="{974291D9-8A20-1378-EC50-D3F8CAE5B600}"/>
-            </a:ext>
-          </a:extLst>
-        </p:cNvPr>
-        <p:cNvGrpSpPr/>
-        <p:nvPr/>
-      </p:nvGrpSpPr>
-      <p:grpSpPr>
-        <a:xfrm>
-          <a:off x="0" y="0"/>
-          <a:ext cx="0" cy="0"/>
-          <a:chOff x="0" y="0"/>
-          <a:chExt cx="0" cy="0"/>
-        </a:xfrm>
-      </p:grpSpPr>
-    </p:spTree>
-    <p:extLst>
-      <p:ext uri="{BB962C8B-B14F-4D97-AF65-F5344CB8AC3E}">
-        <p14:creationId xmlns:p14="http://schemas.microsoft.com/office/powerpoint/2010/main" val="864629097"/>
       </p:ext>
     </p:extLst>
   </p:cSld>

--- a/Output/Spats_plots.pptx
+++ b/Output/Spats_plots.pptx
@@ -5,9 +5,9 @@
     <p:sldMasterId id="2147483648" r:id="rId1"/>
   </p:sldMasterIdLst>
   <p:sldIdLst>
-    <p:sldId id="258" r:id="rId2"/>
-    <p:sldId id="265" r:id="rId3"/>
-    <p:sldId id="256" r:id="rId4"/>
+    <p:sldId id="256" r:id="rId2"/>
+    <p:sldId id="258" r:id="rId3"/>
+    <p:sldId id="265" r:id="rId4"/>
     <p:sldId id="257" r:id="rId5"/>
     <p:sldId id="259" r:id="rId6"/>
     <p:sldId id="260" r:id="rId7"/>
@@ -3352,13 +3352,7 @@
     </p:bg>
     <p:spTree>
       <p:nvGrpSpPr>
-        <p:cNvPr id="1" name="">
-          <a:extLst>
-            <a:ext uri="{FF2B5EF4-FFF2-40B4-BE49-F238E27FC236}">
-              <a16:creationId xmlns:a16="http://schemas.microsoft.com/office/drawing/2014/main" id="{974291D9-8A20-1378-EC50-D3F8CAE5B600}"/>
-            </a:ext>
-          </a:extLst>
-        </p:cNvPr>
+        <p:cNvPr id="1" name=""/>
         <p:cNvGrpSpPr/>
         <p:nvPr/>
       </p:nvGrpSpPr>
@@ -3372,10 +3366,10 @@
       </p:grpSpPr>
       <p:pic>
         <p:nvPicPr>
-          <p:cNvPr id="10" name="Picture 9">
-            <a:extLst>
-              <a:ext uri="{FF2B5EF4-FFF2-40B4-BE49-F238E27FC236}">
-                <a16:creationId xmlns:a16="http://schemas.microsoft.com/office/drawing/2014/main" id="{88C9544D-5996-12DF-98E9-8FC394BAD26E}"/>
+          <p:cNvPr id="5" name="Picture 4">
+            <a:extLst>
+              <a:ext uri="{FF2B5EF4-FFF2-40B4-BE49-F238E27FC236}">
+                <a16:creationId xmlns:a16="http://schemas.microsoft.com/office/drawing/2014/main" id="{E4FE35BA-C8DD-6B95-BF50-E022DA7100BA}"/>
               </a:ext>
             </a:extLst>
           </p:cNvPr>
@@ -3398,8 +3392,8 @@
         </p:blipFill>
         <p:spPr>
           <a:xfrm>
-            <a:off x="1476607" y="321734"/>
-            <a:ext cx="3387953" cy="2905170"/>
+            <a:off x="1233805" y="321734"/>
+            <a:ext cx="3873557" cy="2905170"/>
           </a:xfrm>
           <a:prstGeom prst="rect">
             <a:avLst/>
@@ -3408,7 +3402,7 @@
       </p:pic>
       <p:sp>
         <p:nvSpPr>
-          <p:cNvPr id="41" name="Rectangle 40">
+          <p:cNvPr id="29" name="Rectangle 28">
             <a:extLst>
               <a:ext uri="{FF2B5EF4-FFF2-40B4-BE49-F238E27FC236}">
                 <a16:creationId xmlns:a16="http://schemas.microsoft.com/office/drawing/2014/main" id="{417CDA24-35F8-4540-8C52-3096D6D94949}"/>
@@ -3474,10 +3468,10 @@
       </p:sp>
       <p:pic>
         <p:nvPicPr>
-          <p:cNvPr id="6" name="Picture 5">
-            <a:extLst>
-              <a:ext uri="{FF2B5EF4-FFF2-40B4-BE49-F238E27FC236}">
-                <a16:creationId xmlns:a16="http://schemas.microsoft.com/office/drawing/2014/main" id="{3CCA702A-B03F-8C31-1AF9-0510B524DCD7}"/>
+          <p:cNvPr id="7" name="Picture 6">
+            <a:extLst>
+              <a:ext uri="{FF2B5EF4-FFF2-40B4-BE49-F238E27FC236}">
+                <a16:creationId xmlns:a16="http://schemas.microsoft.com/office/drawing/2014/main" id="{FB2EAC8A-812F-62DE-B42F-D06A560606D5}"/>
               </a:ext>
             </a:extLst>
           </p:cNvPr>
@@ -3500,8 +3494,8 @@
         </p:blipFill>
         <p:spPr>
           <a:xfrm>
-            <a:off x="7411746" y="321734"/>
-            <a:ext cx="2905170" cy="2905170"/>
+            <a:off x="1487297" y="3486486"/>
+            <a:ext cx="3873557" cy="2905170"/>
           </a:xfrm>
           <a:prstGeom prst="rect">
             <a:avLst/>
@@ -3510,7 +3504,7 @@
       </p:pic>
       <p:sp>
         <p:nvSpPr>
-          <p:cNvPr id="43" name="Rectangle 42">
+          <p:cNvPr id="30" name="Rectangle 29">
             <a:extLst>
               <a:ext uri="{FF2B5EF4-FFF2-40B4-BE49-F238E27FC236}">
                 <a16:creationId xmlns:a16="http://schemas.microsoft.com/office/drawing/2014/main" id="{8658BFE0-4E65-4174-9C75-687C94E88273}"/>
@@ -3576,7 +3570,7 @@
       </p:sp>
       <p:sp>
         <p:nvSpPr>
-          <p:cNvPr id="45" name="Rectangle 44">
+          <p:cNvPr id="31" name="Rectangle 30">
             <a:extLst>
               <a:ext uri="{FF2B5EF4-FFF2-40B4-BE49-F238E27FC236}">
                 <a16:creationId xmlns:a16="http://schemas.microsoft.com/office/drawing/2014/main" id="{FA75DFED-A0C1-4A83-BE1D-0271C1826EF6}"/>
@@ -3642,10 +3636,10 @@
       </p:sp>
       <p:pic>
         <p:nvPicPr>
-          <p:cNvPr id="8" name="Picture 7">
-            <a:extLst>
-              <a:ext uri="{FF2B5EF4-FFF2-40B4-BE49-F238E27FC236}">
-                <a16:creationId xmlns:a16="http://schemas.microsoft.com/office/drawing/2014/main" id="{8B5258E3-4D04-720B-CD49-F5D2EA8D460A}"/>
+          <p:cNvPr id="3" name="Picture 2">
+            <a:extLst>
+              <a:ext uri="{FF2B5EF4-FFF2-40B4-BE49-F238E27FC236}">
+                <a16:creationId xmlns:a16="http://schemas.microsoft.com/office/drawing/2014/main" id="{E7ED143D-E1E1-2B7D-9777-D1C9950355B5}"/>
               </a:ext>
             </a:extLst>
           </p:cNvPr>
@@ -3668,8 +3662,8 @@
         </p:blipFill>
         <p:spPr>
           <a:xfrm>
-            <a:off x="1560927" y="3631096"/>
-            <a:ext cx="3219312" cy="2760560"/>
+            <a:off x="7084638" y="321734"/>
+            <a:ext cx="3680744" cy="2760560"/>
           </a:xfrm>
           <a:prstGeom prst="rect">
             <a:avLst/>
@@ -3678,10 +3672,10 @@
       </p:pic>
       <p:pic>
         <p:nvPicPr>
-          <p:cNvPr id="13" name="Picture 12">
-            <a:extLst>
-              <a:ext uri="{FF2B5EF4-FFF2-40B4-BE49-F238E27FC236}">
-                <a16:creationId xmlns:a16="http://schemas.microsoft.com/office/drawing/2014/main" id="{A3ECC8D8-A7A1-7EBE-9608-31F2D6AEABBB}"/>
+          <p:cNvPr id="9" name="Picture 8">
+            <a:extLst>
+              <a:ext uri="{FF2B5EF4-FFF2-40B4-BE49-F238E27FC236}">
+                <a16:creationId xmlns:a16="http://schemas.microsoft.com/office/drawing/2014/main" id="{3041A933-B1DF-C75D-8767-3EDADE391BD3}"/>
               </a:ext>
             </a:extLst>
           </p:cNvPr>
@@ -3704,8 +3698,8 @@
         </p:blipFill>
         <p:spPr>
           <a:xfrm>
-            <a:off x="7254675" y="3631096"/>
-            <a:ext cx="3219312" cy="2760560"/>
+            <a:off x="7177963" y="3631096"/>
+            <a:ext cx="3680744" cy="2760560"/>
           </a:xfrm>
           <a:prstGeom prst="rect">
             <a:avLst/>
@@ -3715,7 +3709,7 @@
     </p:spTree>
     <p:extLst>
       <p:ext uri="{BB962C8B-B14F-4D97-AF65-F5344CB8AC3E}">
-        <p14:creationId xmlns:p14="http://schemas.microsoft.com/office/powerpoint/2010/main" val="2350690965"/>
+        <p14:creationId xmlns:p14="http://schemas.microsoft.com/office/powerpoint/2010/main" val="1487958900"/>
       </p:ext>
     </p:extLst>
   </p:cSld>
@@ -3777,7 +3771,7 @@
         <p:cNvPr id="1" name="">
           <a:extLst>
             <a:ext uri="{FF2B5EF4-FFF2-40B4-BE49-F238E27FC236}">
-              <a16:creationId xmlns:a16="http://schemas.microsoft.com/office/drawing/2014/main" id="{0540CF4E-D4DA-A745-A0BE-2F18233BFB5E}"/>
+              <a16:creationId xmlns:a16="http://schemas.microsoft.com/office/drawing/2014/main" id="{974291D9-8A20-1378-EC50-D3F8CAE5B600}"/>
             </a:ext>
           </a:extLst>
         </p:cNvPr>
@@ -3792,12 +3786,48 @@
           <a:chExt cx="0" cy="0"/>
         </a:xfrm>
       </p:grpSpPr>
+      <p:pic>
+        <p:nvPicPr>
+          <p:cNvPr id="10" name="Picture 9">
+            <a:extLst>
+              <a:ext uri="{FF2B5EF4-FFF2-40B4-BE49-F238E27FC236}">
+                <a16:creationId xmlns:a16="http://schemas.microsoft.com/office/drawing/2014/main" id="{88C9544D-5996-12DF-98E9-8FC394BAD26E}"/>
+              </a:ext>
+            </a:extLst>
+          </p:cNvPr>
+          <p:cNvPicPr>
+            <a:picLocks noChangeAspect="1"/>
+          </p:cNvPicPr>
+          <p:nvPr/>
+        </p:nvPicPr>
+        <p:blipFill>
+          <a:blip r:embed="rId2">
+            <a:extLst>
+              <a:ext uri="{28A0092B-C50C-407E-A947-70E740481C1C}">
+                <a14:useLocalDpi xmlns:a14="http://schemas.microsoft.com/office/drawing/2010/main" val="0"/>
+              </a:ext>
+            </a:extLst>
+          </a:blip>
+          <a:stretch>
+            <a:fillRect/>
+          </a:stretch>
+        </p:blipFill>
+        <p:spPr>
+          <a:xfrm>
+            <a:off x="1476607" y="321734"/>
+            <a:ext cx="3387953" cy="2905170"/>
+          </a:xfrm>
+          <a:prstGeom prst="rect">
+            <a:avLst/>
+          </a:prstGeom>
+        </p:spPr>
+      </p:pic>
       <p:sp>
         <p:nvSpPr>
           <p:cNvPr id="41" name="Rectangle 40">
             <a:extLst>
               <a:ext uri="{FF2B5EF4-FFF2-40B4-BE49-F238E27FC236}">
-                <a16:creationId xmlns:a16="http://schemas.microsoft.com/office/drawing/2014/main" id="{31061D95-6523-47EC-D8C4-0FCDE70AAF04}"/>
+                <a16:creationId xmlns:a16="http://schemas.microsoft.com/office/drawing/2014/main" id="{417CDA24-35F8-4540-8C52-3096D6D94949}"/>
               </a:ext>
               <a:ext uri="{C183D7F6-B498-43B3-948B-1728B52AA6E4}">
                 <adec:decorative xmlns:adec="http://schemas.microsoft.com/office/drawing/2017/decorative" val="1"/>
@@ -3858,12 +3888,48 @@
           </a:p>
         </p:txBody>
       </p:sp>
+      <p:pic>
+        <p:nvPicPr>
+          <p:cNvPr id="6" name="Picture 5">
+            <a:extLst>
+              <a:ext uri="{FF2B5EF4-FFF2-40B4-BE49-F238E27FC236}">
+                <a16:creationId xmlns:a16="http://schemas.microsoft.com/office/drawing/2014/main" id="{3CCA702A-B03F-8C31-1AF9-0510B524DCD7}"/>
+              </a:ext>
+            </a:extLst>
+          </p:cNvPr>
+          <p:cNvPicPr>
+            <a:picLocks noChangeAspect="1"/>
+          </p:cNvPicPr>
+          <p:nvPr/>
+        </p:nvPicPr>
+        <p:blipFill>
+          <a:blip r:embed="rId3">
+            <a:extLst>
+              <a:ext uri="{28A0092B-C50C-407E-A947-70E740481C1C}">
+                <a14:useLocalDpi xmlns:a14="http://schemas.microsoft.com/office/drawing/2010/main" val="0"/>
+              </a:ext>
+            </a:extLst>
+          </a:blip>
+          <a:stretch>
+            <a:fillRect/>
+          </a:stretch>
+        </p:blipFill>
+        <p:spPr>
+          <a:xfrm>
+            <a:off x="7411746" y="321734"/>
+            <a:ext cx="2905170" cy="2905170"/>
+          </a:xfrm>
+          <a:prstGeom prst="rect">
+            <a:avLst/>
+          </a:prstGeom>
+        </p:spPr>
+      </p:pic>
       <p:sp>
         <p:nvSpPr>
           <p:cNvPr id="43" name="Rectangle 42">
             <a:extLst>
               <a:ext uri="{FF2B5EF4-FFF2-40B4-BE49-F238E27FC236}">
-                <a16:creationId xmlns:a16="http://schemas.microsoft.com/office/drawing/2014/main" id="{102B5DF4-C242-A61D-1DD3-1B8F321C4ACC}"/>
+                <a16:creationId xmlns:a16="http://schemas.microsoft.com/office/drawing/2014/main" id="{8658BFE0-4E65-4174-9C75-687C94E88273}"/>
               </a:ext>
               <a:ext uri="{C183D7F6-B498-43B3-948B-1728B52AA6E4}">
                 <adec:decorative xmlns:adec="http://schemas.microsoft.com/office/drawing/2017/decorative" val="1"/>
@@ -3929,7 +3995,7 @@
           <p:cNvPr id="45" name="Rectangle 44">
             <a:extLst>
               <a:ext uri="{FF2B5EF4-FFF2-40B4-BE49-F238E27FC236}">
-                <a16:creationId xmlns:a16="http://schemas.microsoft.com/office/drawing/2014/main" id="{5F228117-D2BA-54B4-86AF-A387FC9BF9D8}"/>
+                <a16:creationId xmlns:a16="http://schemas.microsoft.com/office/drawing/2014/main" id="{FA75DFED-A0C1-4A83-BE1D-0271C1826EF6}"/>
               </a:ext>
               <a:ext uri="{C183D7F6-B498-43B3-948B-1728B52AA6E4}">
                 <adec:decorative xmlns:adec="http://schemas.microsoft.com/office/drawing/2017/decorative" val="1"/>
@@ -3992,10 +4058,10 @@
       </p:sp>
       <p:pic>
         <p:nvPicPr>
-          <p:cNvPr id="11" name="Picture 10">
-            <a:extLst>
-              <a:ext uri="{FF2B5EF4-FFF2-40B4-BE49-F238E27FC236}">
-                <a16:creationId xmlns:a16="http://schemas.microsoft.com/office/drawing/2014/main" id="{09650F47-98ED-A917-0DB9-D9997A76ED69}"/>
+          <p:cNvPr id="8" name="Picture 7">
+            <a:extLst>
+              <a:ext uri="{FF2B5EF4-FFF2-40B4-BE49-F238E27FC236}">
+                <a16:creationId xmlns:a16="http://schemas.microsoft.com/office/drawing/2014/main" id="{8B5258E3-4D04-720B-CD49-F5D2EA8D460A}"/>
               </a:ext>
             </a:extLst>
           </p:cNvPr>
@@ -4005,7 +4071,7 @@
           <p:nvPr/>
         </p:nvPicPr>
         <p:blipFill>
-          <a:blip r:embed="rId2">
+          <a:blip r:embed="rId4">
             <a:extLst>
               <a:ext uri="{28A0092B-C50C-407E-A947-70E740481C1C}">
                 <a14:useLocalDpi xmlns:a14="http://schemas.microsoft.com/office/drawing/2010/main" val="0"/>
@@ -4018,8 +4084,8 @@
         </p:blipFill>
         <p:spPr>
           <a:xfrm>
-            <a:off x="1106122" y="242468"/>
-            <a:ext cx="3381401" cy="2898344"/>
+            <a:off x="1560927" y="3631096"/>
+            <a:ext cx="3219312" cy="2760560"/>
           </a:xfrm>
           <a:prstGeom prst="rect">
             <a:avLst/>
@@ -4028,10 +4094,10 @@
       </p:pic>
       <p:pic>
         <p:nvPicPr>
-          <p:cNvPr id="14" name="Picture 13">
-            <a:extLst>
-              <a:ext uri="{FF2B5EF4-FFF2-40B4-BE49-F238E27FC236}">
-                <a16:creationId xmlns:a16="http://schemas.microsoft.com/office/drawing/2014/main" id="{4669CC5C-3E74-C802-A4E3-CCB9DCE76B38}"/>
+          <p:cNvPr id="13" name="Picture 12">
+            <a:extLst>
+              <a:ext uri="{FF2B5EF4-FFF2-40B4-BE49-F238E27FC236}">
+                <a16:creationId xmlns:a16="http://schemas.microsoft.com/office/drawing/2014/main" id="{A3ECC8D8-A7A1-7EBE-9608-31F2D6AEABBB}"/>
               </a:ext>
             </a:extLst>
           </p:cNvPr>
@@ -4041,7 +4107,7 @@
           <p:nvPr/>
         </p:nvPicPr>
         <p:blipFill>
-          <a:blip r:embed="rId3">
+          <a:blip r:embed="rId5">
             <a:extLst>
               <a:ext uri="{28A0092B-C50C-407E-A947-70E740481C1C}">
                 <a14:useLocalDpi xmlns:a14="http://schemas.microsoft.com/office/drawing/2010/main" val="0"/>
@@ -4054,80 +4120,8 @@
         </p:blipFill>
         <p:spPr>
           <a:xfrm>
-            <a:off x="1028509" y="3584139"/>
-            <a:ext cx="3536625" cy="3031393"/>
-          </a:xfrm>
-          <a:prstGeom prst="rect">
-            <a:avLst/>
-          </a:prstGeom>
-        </p:spPr>
-      </p:pic>
-      <p:pic>
-        <p:nvPicPr>
-          <p:cNvPr id="16" name="Picture 15">
-            <a:extLst>
-              <a:ext uri="{FF2B5EF4-FFF2-40B4-BE49-F238E27FC236}">
-                <a16:creationId xmlns:a16="http://schemas.microsoft.com/office/drawing/2014/main" id="{B3B822F8-11ED-E23E-0FF6-ED4E4D5C1E80}"/>
-              </a:ext>
-            </a:extLst>
-          </p:cNvPr>
-          <p:cNvPicPr>
-            <a:picLocks noChangeAspect="1"/>
-          </p:cNvPicPr>
-          <p:nvPr/>
-        </p:nvPicPr>
-        <p:blipFill>
-          <a:blip r:embed="rId4">
-            <a:extLst>
-              <a:ext uri="{28A0092B-C50C-407E-A947-70E740481C1C}">
-                <a14:useLocalDpi xmlns:a14="http://schemas.microsoft.com/office/drawing/2010/main" val="0"/>
-              </a:ext>
-            </a:extLst>
-          </a:blip>
-          <a:stretch>
-            <a:fillRect/>
-          </a:stretch>
-        </p:blipFill>
-        <p:spPr>
-          <a:xfrm>
-            <a:off x="7704477" y="3696383"/>
-            <a:ext cx="3274721" cy="2806904"/>
-          </a:xfrm>
-          <a:prstGeom prst="rect">
-            <a:avLst/>
-          </a:prstGeom>
-        </p:spPr>
-      </p:pic>
-      <p:pic>
-        <p:nvPicPr>
-          <p:cNvPr id="18" name="Picture 17">
-            <a:extLst>
-              <a:ext uri="{FF2B5EF4-FFF2-40B4-BE49-F238E27FC236}">
-                <a16:creationId xmlns:a16="http://schemas.microsoft.com/office/drawing/2014/main" id="{E339B0F7-7FDC-AEF5-BC38-5D2F4C264750}"/>
-              </a:ext>
-            </a:extLst>
-          </p:cNvPr>
-          <p:cNvPicPr>
-            <a:picLocks noChangeAspect="1"/>
-          </p:cNvPicPr>
-          <p:nvPr/>
-        </p:nvPicPr>
-        <p:blipFill>
-          <a:blip r:embed="rId5">
-            <a:extLst>
-              <a:ext uri="{28A0092B-C50C-407E-A947-70E740481C1C}">
-                <a14:useLocalDpi xmlns:a14="http://schemas.microsoft.com/office/drawing/2010/main" val="0"/>
-              </a:ext>
-            </a:extLst>
-          </a:blip>
-          <a:stretch>
-            <a:fillRect/>
-          </a:stretch>
-        </p:blipFill>
-        <p:spPr>
-          <a:xfrm>
-            <a:off x="7374189" y="194947"/>
-            <a:ext cx="3077502" cy="3077502"/>
+            <a:off x="7254675" y="3631096"/>
+            <a:ext cx="3219312" cy="2760560"/>
           </a:xfrm>
           <a:prstGeom prst="rect">
             <a:avLst/>
@@ -4137,7 +4131,7 @@
     </p:spTree>
     <p:extLst>
       <p:ext uri="{BB962C8B-B14F-4D97-AF65-F5344CB8AC3E}">
-        <p14:creationId xmlns:p14="http://schemas.microsoft.com/office/powerpoint/2010/main" val="622253120"/>
+        <p14:creationId xmlns:p14="http://schemas.microsoft.com/office/powerpoint/2010/main" val="2350690965"/>
       </p:ext>
     </p:extLst>
   </p:cSld>
@@ -4150,9 +4144,23 @@
 <file path=ppt/slides/slide3.xml><?xml version="1.0" encoding="utf-8"?>
 <p:sld xmlns:a="http://schemas.openxmlformats.org/drawingml/2006/main" xmlns:r="http://schemas.openxmlformats.org/officeDocument/2006/relationships" xmlns:p="http://schemas.openxmlformats.org/presentationml/2006/main">
   <p:cSld>
+    <p:bg>
+      <p:bgPr>
+        <a:solidFill>
+          <a:schemeClr val="bg1"/>
+        </a:solidFill>
+        <a:effectLst/>
+      </p:bgPr>
+    </p:bg>
     <p:spTree>
       <p:nvGrpSpPr>
-        <p:cNvPr id="1" name=""/>
+        <p:cNvPr id="1" name="">
+          <a:extLst>
+            <a:ext uri="{FF2B5EF4-FFF2-40B4-BE49-F238E27FC236}">
+              <a16:creationId xmlns:a16="http://schemas.microsoft.com/office/drawing/2014/main" id="{0540CF4E-D4DA-A745-A0BE-2F18233BFB5E}"/>
+            </a:ext>
+          </a:extLst>
+        </p:cNvPr>
         <p:cNvGrpSpPr/>
         <p:nvPr/>
       </p:nvGrpSpPr>
@@ -4164,10 +4172,352 @@
           <a:chExt cx="0" cy="0"/>
         </a:xfrm>
       </p:grpSpPr>
+      <p:pic>
+        <p:nvPicPr>
+          <p:cNvPr id="14" name="Picture 13">
+            <a:extLst>
+              <a:ext uri="{FF2B5EF4-FFF2-40B4-BE49-F238E27FC236}">
+                <a16:creationId xmlns:a16="http://schemas.microsoft.com/office/drawing/2014/main" id="{4669CC5C-3E74-C802-A4E3-CCB9DCE76B38}"/>
+              </a:ext>
+            </a:extLst>
+          </p:cNvPr>
+          <p:cNvPicPr>
+            <a:picLocks noChangeAspect="1"/>
+          </p:cNvPicPr>
+          <p:nvPr/>
+        </p:nvPicPr>
+        <p:blipFill>
+          <a:blip r:embed="rId2">
+            <a:extLst>
+              <a:ext uri="{28A0092B-C50C-407E-A947-70E740481C1C}">
+                <a14:useLocalDpi xmlns:a14="http://schemas.microsoft.com/office/drawing/2010/main" val="0"/>
+              </a:ext>
+            </a:extLst>
+          </a:blip>
+          <a:stretch>
+            <a:fillRect/>
+          </a:stretch>
+        </p:blipFill>
+        <p:spPr>
+          <a:xfrm>
+            <a:off x="1476607" y="321734"/>
+            <a:ext cx="3387953" cy="2905170"/>
+          </a:xfrm>
+          <a:prstGeom prst="rect">
+            <a:avLst/>
+          </a:prstGeom>
+        </p:spPr>
+      </p:pic>
+      <p:sp>
+        <p:nvSpPr>
+          <p:cNvPr id="50" name="Rectangle 49">
+            <a:extLst>
+              <a:ext uri="{FF2B5EF4-FFF2-40B4-BE49-F238E27FC236}">
+                <a16:creationId xmlns:a16="http://schemas.microsoft.com/office/drawing/2014/main" id="{417CDA24-35F8-4540-8C52-3096D6D94949}"/>
+              </a:ext>
+              <a:ext uri="{C183D7F6-B498-43B3-948B-1728B52AA6E4}">
+                <adec:decorative xmlns:adec="http://schemas.microsoft.com/office/drawing/2017/decorative" val="1"/>
+              </a:ext>
+            </a:extLst>
+          </p:cNvPr>
+          <p:cNvSpPr>
+            <a:spLocks noGrp="1" noRot="1" noChangeAspect="1" noMove="1" noResize="1" noEditPoints="1" noAdjustHandles="1" noChangeArrowheads="1" noChangeShapeType="1" noTextEdit="1"/>
+          </p:cNvSpPr>
+          <p:nvPr>
+            <p:extLst>
+              <p:ext uri="{386F3935-93C4-4BCD-93E2-E3B085C9AB24}">
+                <p16:designElem xmlns:p16="http://schemas.microsoft.com/office/powerpoint/2015/main" val="1"/>
+              </p:ext>
+            </p:extLst>
+          </p:nvPr>
+        </p:nvSpPr>
+        <p:spPr>
+          <a:xfrm>
+            <a:off x="6050280" y="0"/>
+            <a:ext cx="91440" cy="6858000"/>
+          </a:xfrm>
+          <a:prstGeom prst="rect">
+            <a:avLst/>
+          </a:prstGeom>
+          <a:solidFill>
+            <a:schemeClr val="tx1">
+              <a:lumMod val="75000"/>
+              <a:lumOff val="25000"/>
+            </a:schemeClr>
+          </a:solidFill>
+          <a:ln>
+            <a:noFill/>
+          </a:ln>
+        </p:spPr>
+        <p:style>
+          <a:lnRef idx="2">
+            <a:schemeClr val="accent1">
+              <a:shade val="50000"/>
+            </a:schemeClr>
+          </a:lnRef>
+          <a:fillRef idx="1">
+            <a:schemeClr val="accent1"/>
+          </a:fillRef>
+          <a:effectRef idx="0">
+            <a:schemeClr val="accent1"/>
+          </a:effectRef>
+          <a:fontRef idx="minor">
+            <a:schemeClr val="lt1"/>
+          </a:fontRef>
+        </p:style>
+        <p:txBody>
+          <a:bodyPr rtlCol="0" anchor="ctr"/>
+          <a:lstStyle/>
+          <a:p>
+            <a:pPr algn="ctr"/>
+            <a:endParaRPr lang="en-US"/>
+          </a:p>
+        </p:txBody>
+      </p:sp>
+      <p:pic>
+        <p:nvPicPr>
+          <p:cNvPr id="18" name="Picture 17">
+            <a:extLst>
+              <a:ext uri="{FF2B5EF4-FFF2-40B4-BE49-F238E27FC236}">
+                <a16:creationId xmlns:a16="http://schemas.microsoft.com/office/drawing/2014/main" id="{E339B0F7-7FDC-AEF5-BC38-5D2F4C264750}"/>
+              </a:ext>
+            </a:extLst>
+          </p:cNvPr>
+          <p:cNvPicPr>
+            <a:picLocks noChangeAspect="1"/>
+          </p:cNvPicPr>
+          <p:nvPr/>
+        </p:nvPicPr>
+        <p:blipFill>
+          <a:blip r:embed="rId3">
+            <a:extLst>
+              <a:ext uri="{28A0092B-C50C-407E-A947-70E740481C1C}">
+                <a14:useLocalDpi xmlns:a14="http://schemas.microsoft.com/office/drawing/2010/main" val="0"/>
+              </a:ext>
+            </a:extLst>
+          </a:blip>
+          <a:stretch>
+            <a:fillRect/>
+          </a:stretch>
+        </p:blipFill>
+        <p:spPr>
+          <a:xfrm>
+            <a:off x="7411746" y="321734"/>
+            <a:ext cx="2905170" cy="2905170"/>
+          </a:xfrm>
+          <a:prstGeom prst="rect">
+            <a:avLst/>
+          </a:prstGeom>
+        </p:spPr>
+      </p:pic>
+      <p:sp>
+        <p:nvSpPr>
+          <p:cNvPr id="52" name="Rectangle 51">
+            <a:extLst>
+              <a:ext uri="{FF2B5EF4-FFF2-40B4-BE49-F238E27FC236}">
+                <a16:creationId xmlns:a16="http://schemas.microsoft.com/office/drawing/2014/main" id="{8658BFE0-4E65-4174-9C75-687C94E88273}"/>
+              </a:ext>
+              <a:ext uri="{C183D7F6-B498-43B3-948B-1728B52AA6E4}">
+                <adec:decorative xmlns:adec="http://schemas.microsoft.com/office/drawing/2017/decorative" val="1"/>
+              </a:ext>
+            </a:extLst>
+          </p:cNvPr>
+          <p:cNvSpPr>
+            <a:spLocks noGrp="1" noRot="1" noChangeAspect="1" noMove="1" noResize="1" noEditPoints="1" noAdjustHandles="1" noChangeArrowheads="1" noChangeShapeType="1" noTextEdit="1"/>
+          </p:cNvSpPr>
+          <p:nvPr>
+            <p:extLst>
+              <p:ext uri="{386F3935-93C4-4BCD-93E2-E3B085C9AB24}">
+                <p16:designElem xmlns:p16="http://schemas.microsoft.com/office/powerpoint/2015/main" val="1"/>
+              </p:ext>
+            </p:extLst>
+          </p:nvPr>
+        </p:nvSpPr>
+        <p:spPr>
+          <a:xfrm>
+            <a:off x="0" y="3383280"/>
+            <a:ext cx="6126480" cy="91440"/>
+          </a:xfrm>
+          <a:prstGeom prst="rect">
+            <a:avLst/>
+          </a:prstGeom>
+          <a:solidFill>
+            <a:schemeClr val="tx1">
+              <a:lumMod val="75000"/>
+              <a:lumOff val="25000"/>
+            </a:schemeClr>
+          </a:solidFill>
+          <a:ln>
+            <a:noFill/>
+          </a:ln>
+        </p:spPr>
+        <p:style>
+          <a:lnRef idx="2">
+            <a:schemeClr val="accent1">
+              <a:shade val="50000"/>
+            </a:schemeClr>
+          </a:lnRef>
+          <a:fillRef idx="1">
+            <a:schemeClr val="accent1"/>
+          </a:fillRef>
+          <a:effectRef idx="0">
+            <a:schemeClr val="accent1"/>
+          </a:effectRef>
+          <a:fontRef idx="minor">
+            <a:schemeClr val="lt1"/>
+          </a:fontRef>
+        </p:style>
+        <p:txBody>
+          <a:bodyPr rtlCol="0" anchor="ctr"/>
+          <a:lstStyle/>
+          <a:p>
+            <a:pPr algn="ctr"/>
+            <a:endParaRPr lang="en-US"/>
+          </a:p>
+        </p:txBody>
+      </p:sp>
+      <p:sp>
+        <p:nvSpPr>
+          <p:cNvPr id="54" name="Rectangle 53">
+            <a:extLst>
+              <a:ext uri="{FF2B5EF4-FFF2-40B4-BE49-F238E27FC236}">
+                <a16:creationId xmlns:a16="http://schemas.microsoft.com/office/drawing/2014/main" id="{FA75DFED-A0C1-4A83-BE1D-0271C1826EF6}"/>
+              </a:ext>
+              <a:ext uri="{C183D7F6-B498-43B3-948B-1728B52AA6E4}">
+                <adec:decorative xmlns:adec="http://schemas.microsoft.com/office/drawing/2017/decorative" val="1"/>
+              </a:ext>
+            </a:extLst>
+          </p:cNvPr>
+          <p:cNvSpPr>
+            <a:spLocks noGrp="1" noRot="1" noChangeAspect="1" noMove="1" noResize="1" noEditPoints="1" noAdjustHandles="1" noChangeArrowheads="1" noChangeShapeType="1" noTextEdit="1"/>
+          </p:cNvSpPr>
+          <p:nvPr>
+            <p:extLst>
+              <p:ext uri="{386F3935-93C4-4BCD-93E2-E3B085C9AB24}">
+                <p16:designElem xmlns:p16="http://schemas.microsoft.com/office/powerpoint/2015/main" val="1"/>
+              </p:ext>
+            </p:extLst>
+          </p:nvPr>
+        </p:nvSpPr>
+        <p:spPr>
+          <a:xfrm>
+            <a:off x="6065520" y="3383280"/>
+            <a:ext cx="6126480" cy="91440"/>
+          </a:xfrm>
+          <a:prstGeom prst="rect">
+            <a:avLst/>
+          </a:prstGeom>
+          <a:solidFill>
+            <a:schemeClr val="tx1">
+              <a:lumMod val="75000"/>
+              <a:lumOff val="25000"/>
+            </a:schemeClr>
+          </a:solidFill>
+          <a:ln>
+            <a:noFill/>
+          </a:ln>
+        </p:spPr>
+        <p:style>
+          <a:lnRef idx="2">
+            <a:schemeClr val="accent1">
+              <a:shade val="50000"/>
+            </a:schemeClr>
+          </a:lnRef>
+          <a:fillRef idx="1">
+            <a:schemeClr val="accent1"/>
+          </a:fillRef>
+          <a:effectRef idx="0">
+            <a:schemeClr val="accent1"/>
+          </a:effectRef>
+          <a:fontRef idx="minor">
+            <a:schemeClr val="lt1"/>
+          </a:fontRef>
+        </p:style>
+        <p:txBody>
+          <a:bodyPr rtlCol="0" anchor="ctr"/>
+          <a:lstStyle/>
+          <a:p>
+            <a:pPr algn="ctr"/>
+            <a:endParaRPr lang="en-US"/>
+          </a:p>
+        </p:txBody>
+      </p:sp>
+      <p:pic>
+        <p:nvPicPr>
+          <p:cNvPr id="16" name="Picture 15">
+            <a:extLst>
+              <a:ext uri="{FF2B5EF4-FFF2-40B4-BE49-F238E27FC236}">
+                <a16:creationId xmlns:a16="http://schemas.microsoft.com/office/drawing/2014/main" id="{B3B822F8-11ED-E23E-0FF6-ED4E4D5C1E80}"/>
+              </a:ext>
+            </a:extLst>
+          </p:cNvPr>
+          <p:cNvPicPr>
+            <a:picLocks noChangeAspect="1"/>
+          </p:cNvPicPr>
+          <p:nvPr/>
+        </p:nvPicPr>
+        <p:blipFill>
+          <a:blip r:embed="rId4">
+            <a:extLst>
+              <a:ext uri="{28A0092B-C50C-407E-A947-70E740481C1C}">
+                <a14:useLocalDpi xmlns:a14="http://schemas.microsoft.com/office/drawing/2010/main" val="0"/>
+              </a:ext>
+            </a:extLst>
+          </a:blip>
+          <a:stretch>
+            <a:fillRect/>
+          </a:stretch>
+        </p:blipFill>
+        <p:spPr>
+          <a:xfrm>
+            <a:off x="1556221" y="3631096"/>
+            <a:ext cx="3228724" cy="2760560"/>
+          </a:xfrm>
+          <a:prstGeom prst="rect">
+            <a:avLst/>
+          </a:prstGeom>
+        </p:spPr>
+      </p:pic>
+      <p:pic>
+        <p:nvPicPr>
+          <p:cNvPr id="11" name="Picture 10">
+            <a:extLst>
+              <a:ext uri="{FF2B5EF4-FFF2-40B4-BE49-F238E27FC236}">
+                <a16:creationId xmlns:a16="http://schemas.microsoft.com/office/drawing/2014/main" id="{09650F47-98ED-A917-0DB9-D9997A76ED69}"/>
+              </a:ext>
+            </a:extLst>
+          </p:cNvPr>
+          <p:cNvPicPr>
+            <a:picLocks noChangeAspect="1"/>
+          </p:cNvPicPr>
+          <p:nvPr/>
+        </p:nvPicPr>
+        <p:blipFill>
+          <a:blip r:embed="rId5">
+            <a:extLst>
+              <a:ext uri="{28A0092B-C50C-407E-A947-70E740481C1C}">
+                <a14:useLocalDpi xmlns:a14="http://schemas.microsoft.com/office/drawing/2010/main" val="0"/>
+              </a:ext>
+            </a:extLst>
+          </a:blip>
+          <a:stretch>
+            <a:fillRect/>
+          </a:stretch>
+        </p:blipFill>
+        <p:spPr>
+          <a:xfrm>
+            <a:off x="7254675" y="3631096"/>
+            <a:ext cx="3219312" cy="2760560"/>
+          </a:xfrm>
+          <a:prstGeom prst="rect">
+            <a:avLst/>
+          </a:prstGeom>
+        </p:spPr>
+      </p:pic>
     </p:spTree>
     <p:extLst>
       <p:ext uri="{BB962C8B-B14F-4D97-AF65-F5344CB8AC3E}">
-        <p14:creationId xmlns:p14="http://schemas.microsoft.com/office/powerpoint/2010/main" val="1487958900"/>
+        <p14:creationId xmlns:p14="http://schemas.microsoft.com/office/powerpoint/2010/main" val="622253120"/>
       </p:ext>
     </p:extLst>
   </p:cSld>
